--- a/CleanMesh_매뉴얼.pptx
+++ b/CleanMesh_매뉴얼.pptx
@@ -3293,7 +3293,7 @@
                 </a:solidFill>
                 <a:latin typeface="맑은 고딕"/>
               </a:rPr>
-              <a:t>2026-06-23</a:t>
+              <a:t>2026-06-24</a:t>
             </a:r>
           </a:p>
         </p:txBody>
@@ -8674,7 +8674,7 @@
                 </a:solidFill>
                 <a:latin typeface="맑은 고딕"/>
               </a:rPr>
-              <a:t>USD / GLB로 익스포트 → Omniverse / Twinmotion / Unreal DT로</a:t>
+              <a:t>USD / GLB로 익스포트 → Omniverse / Twinmotion / BIM 협업툴로</a:t>
             </a:r>
           </a:p>
         </p:txBody>
@@ -11682,7 +11682,7 @@
                           </a:solidFill>
                           <a:latin typeface="맑은 고딕"/>
                         </a:rPr>
-                        <a:t>게임/LOD, DT 비권장</a:t>
+                        <a:t>단색 LOD · 모듈화 용 (DT 비권장)</a:t>
                       </a:r>
                     </a:p>
                   </a:txBody>

--- a/CleanMesh_매뉴얼.pptx
+++ b/CleanMesh_매뉴얼.pptx
@@ -25,6 +25,7 @@
     <p:sldId id="273" r:id="rId24"/>
     <p:sldId id="274" r:id="rId25"/>
     <p:sldId id="275" r:id="rId26"/>
+    <p:sldId id="276" r:id="rId27"/>
   </p:sldIdLst>
   <p:sldSz cx="12191695" cy="6858000" type="screen4x3"/>
   <p:notesSz cx="6858000" cy="9144000"/>
@@ -3293,7 +3294,7 @@
                 </a:solidFill>
                 <a:latin typeface="맑은 고딕"/>
               </a:rPr>
-              <a:t>2026-06-24</a:t>
+              <a:t>2026-06-30</a:t>
             </a:r>
           </a:p>
         </p:txBody>
@@ -4125,7 +4126,7 @@
                 </a:solidFill>
                 <a:latin typeface="맑은 고딕"/>
               </a:rPr>
-              <a:t>CleanMesh Studio v1.2 (Digital Twin)  ·  10/20</a:t>
+              <a:t>CleanMesh Studio v1.2 (Digital Twin)  ·  10/21</a:t>
             </a:r>
           </a:p>
         </p:txBody>
@@ -4767,7 +4768,7 @@
                 </a:solidFill>
                 <a:latin typeface="맑은 고딕"/>
               </a:rPr>
-              <a:t>CleanMesh Studio v1.2 (Digital Twin)  ·  11/20</a:t>
+              <a:t>CleanMesh Studio v1.2 (Digital Twin)  ·  11/21</a:t>
             </a:r>
           </a:p>
         </p:txBody>
@@ -5159,7 +5160,7 @@
                 </a:solidFill>
                 <a:latin typeface="맑은 고딕"/>
               </a:rPr>
-              <a:t>CleanMesh Studio v1.2 (Digital Twin)  ·  12/20</a:t>
+              <a:t>CleanMesh Studio v1.2 (Digital Twin)  ·  12/21</a:t>
             </a:r>
           </a:p>
         </p:txBody>
@@ -5733,7 +5734,7 @@
                 </a:solidFill>
                 <a:latin typeface="맑은 고딕"/>
               </a:rPr>
-              <a:t>CleanMesh Studio v1.2 (Digital Twin)  ·  13/20</a:t>
+              <a:t>CleanMesh Studio v1.2 (Digital Twin)  ·  13/21</a:t>
             </a:r>
           </a:p>
         </p:txBody>
@@ -6122,7 +6123,7 @@
                 </a:solidFill>
                 <a:latin typeface="맑은 고딕"/>
               </a:rPr>
-              <a:t>CleanMesh Studio v1.2 (Digital Twin)  ·  14/20</a:t>
+              <a:t>CleanMesh Studio v1.2 (Digital Twin)  ·  14/21</a:t>
             </a:r>
           </a:p>
         </p:txBody>
@@ -6588,7 +6589,7 @@
                 </a:solidFill>
                 <a:latin typeface="맑은 고딕"/>
               </a:rPr>
-              <a:t>CleanMesh Studio v1.2 (Digital Twin)  ·  15/20</a:t>
+              <a:t>CleanMesh Studio v1.2 (Digital Twin)  ·  15/21</a:t>
             </a:r>
           </a:p>
         </p:txBody>
@@ -7178,7 +7179,7 @@
                 </a:solidFill>
                 <a:latin typeface="맑은 고딕"/>
               </a:rPr>
-              <a:t>CleanMesh Studio v1.2 (Digital Twin)  ·  16/20</a:t>
+              <a:t>CleanMesh Studio v1.2 (Digital Twin)  ·  16/21</a:t>
             </a:r>
           </a:p>
         </p:txBody>
@@ -7753,7 +7754,7 @@
                 </a:solidFill>
                 <a:latin typeface="맑은 고딕"/>
               </a:rPr>
-              <a:t>CleanMesh Studio v1.2 (Digital Twin)  ·  17/20</a:t>
+              <a:t>CleanMesh Studio v1.2 (Digital Twin)  ·  17/21</a:t>
             </a:r>
           </a:p>
         </p:txBody>
@@ -8055,7 +8056,7 @@
                 </a:solidFill>
                 <a:latin typeface="맑은 고딕"/>
               </a:rPr>
-              <a:t>CleanMesh Studio v1.2 (Digital Twin)  ·  18/20</a:t>
+              <a:t>CleanMesh Studio v1.2 (Digital Twin)  ·  18/21</a:t>
             </a:r>
           </a:p>
         </p:txBody>
@@ -8222,7 +8223,7 @@
           <a:lstStyle/>
           <a:p>
             <a:r>
-              <a:rPr sz="1500" b="1">
+              <a:rPr sz="1400" b="1">
                 <a:solidFill>
                   <a:srgbClr val="4F8CFF"/>
                 </a:solidFill>
@@ -8231,7 +8232,7 @@
               <a:t>1  </a:t>
             </a:r>
             <a:r>
-              <a:rPr sz="1500">
+              <a:rPr sz="1400">
                 <a:solidFill>
                   <a:srgbClr val="E8EAED"/>
                 </a:solidFill>
@@ -8242,7 +8243,7 @@
           </a:p>
           <a:p>
             <a:r>
-              <a:rPr sz="1500" b="1">
+              <a:rPr sz="1400" b="1">
                 <a:solidFill>
                   <a:srgbClr val="4F8CFF"/>
                 </a:solidFill>
@@ -8251,7 +8252,7 @@
               <a:t>2  </a:t>
             </a:r>
             <a:r>
-              <a:rPr sz="1500">
+              <a:rPr sz="1400">
                 <a:solidFill>
                   <a:srgbClr val="E8EAED"/>
                 </a:solidFill>
@@ -8262,7 +8263,7 @@
           </a:p>
           <a:p>
             <a:r>
-              <a:rPr sz="1500" b="1">
+              <a:rPr sz="1400" b="1">
                 <a:solidFill>
                   <a:srgbClr val="4F8CFF"/>
                 </a:solidFill>
@@ -8271,7 +8272,7 @@
               <a:t>3  </a:t>
             </a:r>
             <a:r>
-              <a:rPr sz="1500">
+              <a:rPr sz="1400">
                 <a:solidFill>
                   <a:srgbClr val="E8EAED"/>
                 </a:solidFill>
@@ -8282,7 +8283,7 @@
           </a:p>
           <a:p>
             <a:r>
-              <a:rPr sz="1500" b="1">
+              <a:rPr sz="1400" b="1">
                 <a:solidFill>
                   <a:srgbClr val="4F8CFF"/>
                 </a:solidFill>
@@ -8291,7 +8292,7 @@
               <a:t>4  </a:t>
             </a:r>
             <a:r>
-              <a:rPr sz="1500">
+              <a:rPr sz="1400">
                 <a:solidFill>
                   <a:srgbClr val="E8EAED"/>
                 </a:solidFill>
@@ -8302,7 +8303,7 @@
           </a:p>
           <a:p>
             <a:r>
-              <a:rPr sz="1500" b="1">
+              <a:rPr sz="1400" b="1">
                 <a:solidFill>
                   <a:srgbClr val="4F8CFF"/>
                 </a:solidFill>
@@ -8311,38 +8312,58 @@
               <a:t>5  </a:t>
             </a:r>
             <a:r>
-              <a:rPr sz="1500">
+              <a:rPr sz="1400">
                 <a:solidFill>
                   <a:srgbClr val="E8EAED"/>
                 </a:solidFill>
                 <a:latin typeface="맑은 고딕"/>
               </a:rPr>
+              <a:t>☑ SimReady 자산으로 출력 체크 (USDPhysics 자동 주입)</a:t>
+            </a:r>
+          </a:p>
+          <a:p>
+            <a:r>
+              <a:rPr sz="1400" b="1">
+                <a:solidFill>
+                  <a:srgbClr val="4F8CFF"/>
+                </a:solidFill>
+                <a:latin typeface="맑은 고딕"/>
+              </a:rPr>
+              <a:t>6  </a:t>
+            </a:r>
+            <a:r>
+              <a:rPr sz="1400">
+                <a:solidFill>
+                  <a:srgbClr val="E8EAED"/>
+                </a:solidFill>
+                <a:latin typeface="맑은 고딕"/>
+              </a:rPr>
               <a:t>▶ Generate → 약 70초</a:t>
             </a:r>
           </a:p>
           <a:p>
             <a:r>
-              <a:rPr sz="1500" b="1">
+              <a:rPr sz="1400" b="1">
                 <a:solidFill>
                   <a:srgbClr val="4F8CFF"/>
                 </a:solidFill>
                 <a:latin typeface="맑은 고딕"/>
               </a:rPr>
-              <a:t>6  </a:t>
-            </a:r>
-            <a:r>
-              <a:rPr sz="1500">
+              <a:t>7  </a:t>
+            </a:r>
+            <a:r>
+              <a:rPr sz="1400">
                 <a:solidFill>
                   <a:srgbClr val="E8EAED"/>
                 </a:solidFill>
                 <a:latin typeface="맑은 고딕"/>
               </a:rPr>
-              <a:t>Omniverse / Twinmotion / Unreal DT에서 import</a:t>
-            </a:r>
-          </a:p>
-          <a:p>
-            <a:r>
-              <a:rPr sz="1500" b="1">
+              <a:t>Omniverse / Twinmotion / BIM 협업툴에서 import → 시뮬레이션 즉시 가능</a:t>
+            </a:r>
+          </a:p>
+          <a:p>
+            <a:r>
+              <a:rPr sz="1400" b="1">
                 <a:solidFill>
                   <a:srgbClr val="4F8CFF"/>
                 </a:solidFill>
@@ -8351,13 +8372,13 @@
               <a:t>→  </a:t>
             </a:r>
             <a:r>
-              <a:rPr sz="1500">
+              <a:rPr sz="1400">
                 <a:solidFill>
                   <a:srgbClr val="E8EAED"/>
                 </a:solidFill>
                 <a:latin typeface="맑은 고딕"/>
               </a:rPr>
-              <a:t>버전 관리: --deterministic 켜면 같은 사진 → 같은 모델 (재현 가능)</a:t>
+              <a:t>재현성: --deterministic 켜면 같은 사진 → 같은 모델 (16GB+ GPU)</a:t>
             </a:r>
           </a:p>
         </p:txBody>
@@ -8392,7 +8413,7 @@
                 </a:solidFill>
                 <a:latin typeface="맑은 고딕"/>
               </a:rPr>
-              <a:t>CleanMesh Studio v1.2 (Digital Twin)  ·  19/20</a:t>
+              <a:t>CleanMesh Studio v1.2 (Digital Twin)  ·  19/21</a:t>
             </a:r>
           </a:p>
         </p:txBody>
@@ -8709,7 +8730,7 @@
                 </a:solidFill>
                 <a:latin typeface="맑은 고딕"/>
               </a:rPr>
-              <a:t>CleanMesh Studio v1.2 (Digital Twin)  ·  2/20</a:t>
+              <a:t>CleanMesh Studio v1.2 (Digital Twin)  ·  2/21</a:t>
             </a:r>
           </a:p>
         </p:txBody>
@@ -8723,6 +8744,814 @@
 </file>
 
 <file path=ppt/slides/slide20.xml><?xml version="1.0" encoding="utf-8"?>
+<p:sld xmlns:a="http://schemas.openxmlformats.org/drawingml/2006/main" xmlns:p="http://schemas.openxmlformats.org/presentationml/2006/main" xmlns:r="http://schemas.openxmlformats.org/officeDocument/2006/relationships">
+  <p:cSld>
+    <p:bg>
+      <p:bgPr>
+        <a:solidFill>
+          <a:srgbClr val="1A1C20"/>
+        </a:solidFill>
+        <a:effectLst/>
+      </p:bgPr>
+    </p:bg>
+    <p:spTree>
+      <p:nvGrpSpPr>
+        <p:cNvPr id="1" name=""/>
+        <p:cNvGrpSpPr/>
+        <p:nvPr/>
+      </p:nvGrpSpPr>
+      <p:grpSpPr/>
+      <p:sp>
+        <p:nvSpPr>
+          <p:cNvPr id="2" name="TextBox 1"/>
+          <p:cNvSpPr txBox="1"/>
+          <p:nvPr/>
+        </p:nvSpPr>
+        <p:spPr>
+          <a:xfrm>
+            <a:off x="457200" y="274320"/>
+            <a:ext cx="10972800" cy="640080"/>
+          </a:xfrm>
+          <a:prstGeom prst="rect">
+            <a:avLst/>
+          </a:prstGeom>
+          <a:noFill/>
+        </p:spPr>
+        <p:txBody>
+          <a:bodyPr wrap="square">
+            <a:spAutoFit/>
+          </a:bodyPr>
+          <a:lstStyle/>
+          <a:p>
+            <a:pPr algn="l"/>
+            <a:r>
+              <a:rPr sz="2800" b="1">
+                <a:solidFill>
+                  <a:srgbClr val="FFFFFF"/>
+                </a:solidFill>
+                <a:latin typeface="맑은 고딕"/>
+              </a:rPr>
+              <a:t>19. SimReady USD 출력</a:t>
+            </a:r>
+          </a:p>
+        </p:txBody>
+      </p:sp>
+      <p:sp>
+        <p:nvSpPr>
+          <p:cNvPr id="3" name="Rectangle 2"/>
+          <p:cNvSpPr/>
+          <p:nvPr/>
+        </p:nvSpPr>
+        <p:spPr>
+          <a:xfrm>
+            <a:off x="457200" y="914400"/>
+            <a:ext cx="10972800" cy="25400"/>
+          </a:xfrm>
+          <a:prstGeom prst="rect">
+            <a:avLst/>
+          </a:prstGeom>
+          <a:solidFill>
+            <a:srgbClr val="4F8CFF"/>
+          </a:solidFill>
+          <a:ln>
+            <a:noFill/>
+          </a:ln>
+        </p:spPr>
+        <p:style>
+          <a:lnRef idx="1">
+            <a:schemeClr val="accent1"/>
+          </a:lnRef>
+          <a:fillRef idx="3">
+            <a:schemeClr val="accent1"/>
+          </a:fillRef>
+          <a:effectRef idx="2">
+            <a:schemeClr val="accent1"/>
+          </a:effectRef>
+          <a:fontRef idx="minor">
+            <a:schemeClr val="lt1"/>
+          </a:fontRef>
+        </p:style>
+        <p:txBody>
+          <a:bodyPr rtlCol="0" anchor="ctr"/>
+          <a:lstStyle/>
+          <a:p>
+            <a:pPr algn="ctr"/>
+          </a:p>
+        </p:txBody>
+      </p:sp>
+      <p:sp>
+        <p:nvSpPr>
+          <p:cNvPr id="4" name="TextBox 3"/>
+          <p:cNvSpPr txBox="1"/>
+          <p:nvPr/>
+        </p:nvSpPr>
+        <p:spPr>
+          <a:xfrm>
+            <a:off x="457200" y="960120"/>
+            <a:ext cx="10972800" cy="365760"/>
+          </a:xfrm>
+          <a:prstGeom prst="rect">
+            <a:avLst/>
+          </a:prstGeom>
+          <a:noFill/>
+        </p:spPr>
+        <p:txBody>
+          <a:bodyPr wrap="square">
+            <a:spAutoFit/>
+          </a:bodyPr>
+          <a:lstStyle/>
+          <a:p>
+            <a:pPr algn="l"/>
+            <a:r>
+              <a:rPr sz="1200" b="0">
+                <a:solidFill>
+                  <a:srgbClr val="9AA0A6"/>
+                </a:solidFill>
+                <a:latin typeface="맑은 고딕"/>
+              </a:rPr>
+              <a:t>NVIDIA Omniverse 호환 디지털 트윈 자산</a:t>
+            </a:r>
+          </a:p>
+        </p:txBody>
+      </p:sp>
+      <p:graphicFrame>
+        <p:nvGraphicFramePr>
+          <p:cNvPr id="5" name="Table 4"/>
+          <p:cNvGraphicFramePr>
+            <a:graphicFrameLocks noGrp="1"/>
+          </p:cNvGraphicFramePr>
+          <p:nvPr/>
+        </p:nvGraphicFramePr>
+        <p:xfrm>
+          <a:off x="457200" y="1463040"/>
+          <a:ext cx="11247120" cy="3291840"/>
+        </p:xfrm>
+        <a:graphic>
+          <a:graphicData uri="http://schemas.openxmlformats.org/drawingml/2006/table">
+            <a:tbl>
+              <a:tblPr firstRow="1" bandRow="1">
+                <a:tableStyleId>{5C22544A-7EE6-4342-B048-85BDC9FD1C3A}</a:tableStyleId>
+              </a:tblPr>
+              <a:tblGrid>
+                <a:gridCol w="3749040"/>
+                <a:gridCol w="3749040"/>
+                <a:gridCol w="3749040"/>
+              </a:tblGrid>
+              <a:tr h="411480">
+                <a:tc>
+                  <a:txBody>
+                    <a:bodyPr/>
+                    <a:lstStyle/>
+                    <a:p>
+                      <a:r>
+                        <a:rPr sz="1300" b="1">
+                          <a:solidFill>
+                            <a:srgbClr val="FFFFFF"/>
+                          </a:solidFill>
+                          <a:latin typeface="맑은 고딕"/>
+                        </a:rPr>
+                        <a:t>항목</a:t>
+                      </a:r>
+                    </a:p>
+                  </a:txBody>
+                  <a:tcPr>
+                    <a:solidFill>
+                      <a:srgbClr val="4F8CFF"/>
+                    </a:solidFill>
+                  </a:tcPr>
+                </a:tc>
+                <a:tc>
+                  <a:txBody>
+                    <a:bodyPr/>
+                    <a:lstStyle/>
+                    <a:p>
+                      <a:r>
+                        <a:rPr sz="1300" b="1">
+                          <a:solidFill>
+                            <a:srgbClr val="FFFFFF"/>
+                          </a:solidFill>
+                          <a:latin typeface="맑은 고딕"/>
+                        </a:rPr>
+                        <a:t>일반 USD</a:t>
+                      </a:r>
+                    </a:p>
+                  </a:txBody>
+                  <a:tcPr>
+                    <a:solidFill>
+                      <a:srgbClr val="4F8CFF"/>
+                    </a:solidFill>
+                  </a:tcPr>
+                </a:tc>
+                <a:tc>
+                  <a:txBody>
+                    <a:bodyPr/>
+                    <a:lstStyle/>
+                    <a:p>
+                      <a:r>
+                        <a:rPr sz="1300" b="1">
+                          <a:solidFill>
+                            <a:srgbClr val="FFFFFF"/>
+                          </a:solidFill>
+                          <a:latin typeface="맑은 고딕"/>
+                        </a:rPr>
+                        <a:t>SimReady USD (이 시스템)</a:t>
+                      </a:r>
+                    </a:p>
+                  </a:txBody>
+                  <a:tcPr>
+                    <a:solidFill>
+                      <a:srgbClr val="4F8CFF"/>
+                    </a:solidFill>
+                  </a:tcPr>
+                </a:tc>
+              </a:tr>
+              <a:tr h="411480">
+                <a:tc>
+                  <a:txBody>
+                    <a:bodyPr/>
+                    <a:lstStyle/>
+                    <a:p>
+                      <a:r>
+                        <a:rPr sz="1100">
+                          <a:solidFill>
+                            <a:srgbClr val="E8EAED"/>
+                          </a:solidFill>
+                          <a:latin typeface="맑은 고딕"/>
+                        </a:rPr>
+                        <a:t>메시 + 정점 색상</a:t>
+                      </a:r>
+                    </a:p>
+                  </a:txBody>
+                  <a:tcPr>
+                    <a:solidFill>
+                      <a:srgbClr val="24272D"/>
+                    </a:solidFill>
+                  </a:tcPr>
+                </a:tc>
+                <a:tc>
+                  <a:txBody>
+                    <a:bodyPr/>
+                    <a:lstStyle/>
+                    <a:p>
+                      <a:r>
+                        <a:rPr sz="1100">
+                          <a:solidFill>
+                            <a:srgbClr val="E8EAED"/>
+                          </a:solidFill>
+                          <a:latin typeface="맑은 고딕"/>
+                        </a:rPr>
+                        <a:t>✅</a:t>
+                      </a:r>
+                    </a:p>
+                  </a:txBody>
+                  <a:tcPr>
+                    <a:solidFill>
+                      <a:srgbClr val="24272D"/>
+                    </a:solidFill>
+                  </a:tcPr>
+                </a:tc>
+                <a:tc>
+                  <a:txBody>
+                    <a:bodyPr/>
+                    <a:lstStyle/>
+                    <a:p>
+                      <a:r>
+                        <a:rPr sz="1100">
+                          <a:solidFill>
+                            <a:srgbClr val="E8EAED"/>
+                          </a:solidFill>
+                          <a:latin typeface="맑은 고딕"/>
+                        </a:rPr>
+                        <a:t>✅</a:t>
+                      </a:r>
+                    </a:p>
+                  </a:txBody>
+                  <a:tcPr>
+                    <a:solidFill>
+                      <a:srgbClr val="24272D"/>
+                    </a:solidFill>
+                  </a:tcPr>
+                </a:tc>
+              </a:tr>
+              <a:tr h="411480">
+                <a:tc>
+                  <a:txBody>
+                    <a:bodyPr/>
+                    <a:lstStyle/>
+                    <a:p>
+                      <a:r>
+                        <a:rPr sz="1100">
+                          <a:solidFill>
+                            <a:srgbClr val="E8EAED"/>
+                          </a:solidFill>
+                          <a:latin typeface="맑은 고딕"/>
+                        </a:rPr>
+                        <a:t>upAxis=Y / metersPerUnit=1.0</a:t>
+                      </a:r>
+                    </a:p>
+                  </a:txBody>
+                  <a:tcPr>
+                    <a:solidFill>
+                      <a:srgbClr val="24272D"/>
+                    </a:solidFill>
+                  </a:tcPr>
+                </a:tc>
+                <a:tc>
+                  <a:txBody>
+                    <a:bodyPr/>
+                    <a:lstStyle/>
+                    <a:p>
+                      <a:r>
+                        <a:rPr sz="1100">
+                          <a:solidFill>
+                            <a:srgbClr val="E8EAED"/>
+                          </a:solidFill>
+                          <a:latin typeface="맑은 고딕"/>
+                        </a:rPr>
+                        <a:t>종종 누락</a:t>
+                      </a:r>
+                    </a:p>
+                  </a:txBody>
+                  <a:tcPr>
+                    <a:solidFill>
+                      <a:srgbClr val="24272D"/>
+                    </a:solidFill>
+                  </a:tcPr>
+                </a:tc>
+                <a:tc>
+                  <a:txBody>
+                    <a:bodyPr/>
+                    <a:lstStyle/>
+                    <a:p>
+                      <a:r>
+                        <a:rPr sz="1100">
+                          <a:solidFill>
+                            <a:srgbClr val="E8EAED"/>
+                          </a:solidFill>
+                          <a:latin typeface="맑은 고딕"/>
+                        </a:rPr>
+                        <a:t>✅ 강제</a:t>
+                      </a:r>
+                    </a:p>
+                  </a:txBody>
+                  <a:tcPr>
+                    <a:solidFill>
+                      <a:srgbClr val="24272D"/>
+                    </a:solidFill>
+                  </a:tcPr>
+                </a:tc>
+              </a:tr>
+              <a:tr h="411480">
+                <a:tc>
+                  <a:txBody>
+                    <a:bodyPr/>
+                    <a:lstStyle/>
+                    <a:p>
+                      <a:r>
+                        <a:rPr sz="1100">
+                          <a:solidFill>
+                            <a:srgbClr val="E8EAED"/>
+                          </a:solidFill>
+                          <a:latin typeface="맑은 고딕"/>
+                        </a:rPr>
+                        <a:t>Kind=component + assetInfo</a:t>
+                      </a:r>
+                    </a:p>
+                  </a:txBody>
+                  <a:tcPr>
+                    <a:solidFill>
+                      <a:srgbClr val="24272D"/>
+                    </a:solidFill>
+                  </a:tcPr>
+                </a:tc>
+                <a:tc>
+                  <a:txBody>
+                    <a:bodyPr/>
+                    <a:lstStyle/>
+                    <a:p>
+                      <a:r>
+                        <a:rPr sz="1100">
+                          <a:solidFill>
+                            <a:srgbClr val="E8EAED"/>
+                          </a:solidFill>
+                          <a:latin typeface="맑은 고딕"/>
+                        </a:rPr>
+                        <a:t>✗</a:t>
+                      </a:r>
+                    </a:p>
+                  </a:txBody>
+                  <a:tcPr>
+                    <a:solidFill>
+                      <a:srgbClr val="24272D"/>
+                    </a:solidFill>
+                  </a:tcPr>
+                </a:tc>
+                <a:tc>
+                  <a:txBody>
+                    <a:bodyPr/>
+                    <a:lstStyle/>
+                    <a:p>
+                      <a:r>
+                        <a:rPr sz="1100">
+                          <a:solidFill>
+                            <a:srgbClr val="E8EAED"/>
+                          </a:solidFill>
+                          <a:latin typeface="맑은 고딕"/>
+                        </a:rPr>
+                        <a:t>✅</a:t>
+                      </a:r>
+                    </a:p>
+                  </a:txBody>
+                  <a:tcPr>
+                    <a:solidFill>
+                      <a:srgbClr val="24272D"/>
+                    </a:solidFill>
+                  </a:tcPr>
+                </a:tc>
+              </a:tr>
+              <a:tr h="411480">
+                <a:tc>
+                  <a:txBody>
+                    <a:bodyPr/>
+                    <a:lstStyle/>
+                    <a:p>
+                      <a:r>
+                        <a:rPr sz="1100">
+                          <a:solidFill>
+                            <a:srgbClr val="E8EAED"/>
+                          </a:solidFill>
+                          <a:latin typeface="맑은 고딕"/>
+                        </a:rPr>
+                        <a:t>USDPhysics Collider (convex hull)</a:t>
+                      </a:r>
+                    </a:p>
+                  </a:txBody>
+                  <a:tcPr>
+                    <a:solidFill>
+                      <a:srgbClr val="24272D"/>
+                    </a:solidFill>
+                  </a:tcPr>
+                </a:tc>
+                <a:tc>
+                  <a:txBody>
+                    <a:bodyPr/>
+                    <a:lstStyle/>
+                    <a:p>
+                      <a:r>
+                        <a:rPr sz="1100">
+                          <a:solidFill>
+                            <a:srgbClr val="E8EAED"/>
+                          </a:solidFill>
+                          <a:latin typeface="맑은 고딕"/>
+                        </a:rPr>
+                        <a:t>✗</a:t>
+                      </a:r>
+                    </a:p>
+                  </a:txBody>
+                  <a:tcPr>
+                    <a:solidFill>
+                      <a:srgbClr val="24272D"/>
+                    </a:solidFill>
+                  </a:tcPr>
+                </a:tc>
+                <a:tc>
+                  <a:txBody>
+                    <a:bodyPr/>
+                    <a:lstStyle/>
+                    <a:p>
+                      <a:r>
+                        <a:rPr sz="1100">
+                          <a:solidFill>
+                            <a:srgbClr val="E8EAED"/>
+                          </a:solidFill>
+                          <a:latin typeface="맑은 고딕"/>
+                        </a:rPr>
+                        <a:t>✅ 모든 메시</a:t>
+                      </a:r>
+                    </a:p>
+                  </a:txBody>
+                  <a:tcPr>
+                    <a:solidFill>
+                      <a:srgbClr val="24272D"/>
+                    </a:solidFill>
+                  </a:tcPr>
+                </a:tc>
+              </a:tr>
+              <a:tr h="411480">
+                <a:tc>
+                  <a:txBody>
+                    <a:bodyPr/>
+                    <a:lstStyle/>
+                    <a:p>
+                      <a:r>
+                        <a:rPr sz="1100">
+                          <a:solidFill>
+                            <a:srgbClr val="E8EAED"/>
+                          </a:solidFill>
+                          <a:latin typeface="맑은 고딕"/>
+                        </a:rPr>
+                        <a:t>USDPhysics Mass (카테고리별 density)</a:t>
+                      </a:r>
+                    </a:p>
+                  </a:txBody>
+                  <a:tcPr>
+                    <a:solidFill>
+                      <a:srgbClr val="24272D"/>
+                    </a:solidFill>
+                  </a:tcPr>
+                </a:tc>
+                <a:tc>
+                  <a:txBody>
+                    <a:bodyPr/>
+                    <a:lstStyle/>
+                    <a:p>
+                      <a:r>
+                        <a:rPr sz="1100">
+                          <a:solidFill>
+                            <a:srgbClr val="E8EAED"/>
+                          </a:solidFill>
+                          <a:latin typeface="맑은 고딕"/>
+                        </a:rPr>
+                        <a:t>✗</a:t>
+                      </a:r>
+                    </a:p>
+                  </a:txBody>
+                  <a:tcPr>
+                    <a:solidFill>
+                      <a:srgbClr val="24272D"/>
+                    </a:solidFill>
+                  </a:tcPr>
+                </a:tc>
+                <a:tc>
+                  <a:txBody>
+                    <a:bodyPr/>
+                    <a:lstStyle/>
+                    <a:p>
+                      <a:r>
+                        <a:rPr sz="1100">
+                          <a:solidFill>
+                            <a:srgbClr val="E8EAED"/>
+                          </a:solidFill>
+                          <a:latin typeface="맑은 고딕"/>
+                        </a:rPr>
+                        <a:t>✅ steel/wood/Al/box 자동</a:t>
+                      </a:r>
+                    </a:p>
+                  </a:txBody>
+                  <a:tcPr>
+                    <a:solidFill>
+                      <a:srgbClr val="24272D"/>
+                    </a:solidFill>
+                  </a:tcPr>
+                </a:tc>
+              </a:tr>
+              <a:tr h="411480">
+                <a:tc>
+                  <a:txBody>
+                    <a:bodyPr/>
+                    <a:lstStyle/>
+                    <a:p>
+                      <a:r>
+                        <a:rPr sz="1100">
+                          <a:solidFill>
+                            <a:srgbClr val="E8EAED"/>
+                          </a:solidFill>
+                          <a:latin typeface="맑은 고딕"/>
+                        </a:rPr>
+                        <a:t>USDPhysics Material (마찰·반발)</a:t>
+                      </a:r>
+                    </a:p>
+                  </a:txBody>
+                  <a:tcPr>
+                    <a:solidFill>
+                      <a:srgbClr val="24272D"/>
+                    </a:solidFill>
+                  </a:tcPr>
+                </a:tc>
+                <a:tc>
+                  <a:txBody>
+                    <a:bodyPr/>
+                    <a:lstStyle/>
+                    <a:p>
+                      <a:r>
+                        <a:rPr sz="1100">
+                          <a:solidFill>
+                            <a:srgbClr val="E8EAED"/>
+                          </a:solidFill>
+                          <a:latin typeface="맑은 고딕"/>
+                        </a:rPr>
+                        <a:t>✗</a:t>
+                      </a:r>
+                    </a:p>
+                  </a:txBody>
+                  <a:tcPr>
+                    <a:solidFill>
+                      <a:srgbClr val="24272D"/>
+                    </a:solidFill>
+                  </a:tcPr>
+                </a:tc>
+                <a:tc>
+                  <a:txBody>
+                    <a:bodyPr/>
+                    <a:lstStyle/>
+                    <a:p>
+                      <a:r>
+                        <a:rPr sz="1100">
+                          <a:solidFill>
+                            <a:srgbClr val="E8EAED"/>
+                          </a:solidFill>
+                          <a:latin typeface="맑은 고딕"/>
+                        </a:rPr>
+                        <a:t>✅ 기본값 주입</a:t>
+                      </a:r>
+                    </a:p>
+                  </a:txBody>
+                  <a:tcPr>
+                    <a:solidFill>
+                      <a:srgbClr val="24272D"/>
+                    </a:solidFill>
+                  </a:tcPr>
+                </a:tc>
+              </a:tr>
+              <a:tr h="411480">
+                <a:tc>
+                  <a:txBody>
+                    <a:bodyPr/>
+                    <a:lstStyle/>
+                    <a:p>
+                      <a:r>
+                        <a:rPr sz="1100">
+                          <a:solidFill>
+                            <a:srgbClr val="E8EAED"/>
+                          </a:solidFill>
+                          <a:latin typeface="맑은 고딕"/>
+                        </a:rPr>
+                        <a:t>semanticLabel + 실측 mm 스케일</a:t>
+                      </a:r>
+                    </a:p>
+                  </a:txBody>
+                  <a:tcPr>
+                    <a:solidFill>
+                      <a:srgbClr val="24272D"/>
+                    </a:solidFill>
+                  </a:tcPr>
+                </a:tc>
+                <a:tc>
+                  <a:txBody>
+                    <a:bodyPr/>
+                    <a:lstStyle/>
+                    <a:p>
+                      <a:r>
+                        <a:rPr sz="1100">
+                          <a:solidFill>
+                            <a:srgbClr val="E8EAED"/>
+                          </a:solidFill>
+                          <a:latin typeface="맑은 고딕"/>
+                        </a:rPr>
+                        <a:t>✗</a:t>
+                      </a:r>
+                    </a:p>
+                  </a:txBody>
+                  <a:tcPr>
+                    <a:solidFill>
+                      <a:srgbClr val="24272D"/>
+                    </a:solidFill>
+                  </a:tcPr>
+                </a:tc>
+                <a:tc>
+                  <a:txBody>
+                    <a:bodyPr/>
+                    <a:lstStyle/>
+                    <a:p>
+                      <a:r>
+                        <a:rPr sz="1100">
+                          <a:solidFill>
+                            <a:srgbClr val="E8EAED"/>
+                          </a:solidFill>
+                          <a:latin typeface="맑은 고딕"/>
+                        </a:rPr>
+                        <a:t>✅</a:t>
+                      </a:r>
+                    </a:p>
+                  </a:txBody>
+                  <a:tcPr>
+                    <a:solidFill>
+                      <a:srgbClr val="24272D"/>
+                    </a:solidFill>
+                  </a:tcPr>
+                </a:tc>
+              </a:tr>
+            </a:tbl>
+          </a:graphicData>
+        </a:graphic>
+      </p:graphicFrame>
+      <p:sp>
+        <p:nvSpPr>
+          <p:cNvPr id="6" name="TextBox 5"/>
+          <p:cNvSpPr txBox="1"/>
+          <p:nvPr/>
+        </p:nvSpPr>
+        <p:spPr>
+          <a:xfrm>
+            <a:off x="548640" y="5029200"/>
+            <a:ext cx="10972800" cy="1828800"/>
+          </a:xfrm>
+          <a:prstGeom prst="rect">
+            <a:avLst/>
+          </a:prstGeom>
+          <a:noFill/>
+        </p:spPr>
+        <p:txBody>
+          <a:bodyPr wrap="square">
+            <a:spAutoFit/>
+          </a:bodyPr>
+          <a:lstStyle/>
+          <a:p>
+            <a:r>
+              <a:rPr sz="1300" b="1">
+                <a:solidFill>
+                  <a:srgbClr val="4F8CFF"/>
+                </a:solidFill>
+                <a:latin typeface="맑은 고딕"/>
+              </a:rPr>
+              <a:t>→  </a:t>
+            </a:r>
+            <a:r>
+              <a:rPr sz="1300">
+                <a:solidFill>
+                  <a:srgbClr val="E8EAED"/>
+                </a:solidFill>
+                <a:latin typeface="맑은 고딕"/>
+              </a:rPr>
+              <a:t>Omniverse Kit 설치 불필요 — pxr (Blender 5.x 번들 USD Python) 만 사용</a:t>
+            </a:r>
+          </a:p>
+          <a:p>
+            <a:r>
+              <a:rPr sz="1300" b="1">
+                <a:solidFill>
+                  <a:srgbClr val="4F8CFF"/>
+                </a:solidFill>
+                <a:latin typeface="맑은 고딕"/>
+              </a:rPr>
+              <a:t>→  </a:t>
+            </a:r>
+            <a:r>
+              <a:rPr sz="1300">
+                <a:solidFill>
+                  <a:srgbClr val="E8EAED"/>
+                </a:solidFill>
+                <a:latin typeface="맑은 고딕"/>
+              </a:rPr>
+              <a:t>옵션: aif-pipeline 설치된 환경에선 NVIDIA 공식 validator 자동 호출</a:t>
+            </a:r>
+          </a:p>
+        </p:txBody>
+      </p:sp>
+      <p:sp>
+        <p:nvSpPr>
+          <p:cNvPr id="7" name="TextBox 6"/>
+          <p:cNvSpPr txBox="1"/>
+          <p:nvPr/>
+        </p:nvSpPr>
+        <p:spPr>
+          <a:xfrm>
+            <a:off x="457200" y="6400800"/>
+            <a:ext cx="10972800" cy="274320"/>
+          </a:xfrm>
+          <a:prstGeom prst="rect">
+            <a:avLst/>
+          </a:prstGeom>
+          <a:noFill/>
+        </p:spPr>
+        <p:txBody>
+          <a:bodyPr wrap="square">
+            <a:spAutoFit/>
+          </a:bodyPr>
+          <a:lstStyle/>
+          <a:p>
+            <a:pPr algn="r"/>
+            <a:r>
+              <a:rPr sz="900" b="0">
+                <a:solidFill>
+                  <a:srgbClr val="9AA0A6"/>
+                </a:solidFill>
+                <a:latin typeface="맑은 고딕"/>
+              </a:rPr>
+              <a:t>CleanMesh Studio v1.2 (Digital Twin)  ·  20/21</a:t>
+            </a:r>
+          </a:p>
+        </p:txBody>
+      </p:sp>
+    </p:spTree>
+  </p:cSld>
+  <p:clrMapOvr>
+    <a:masterClrMapping/>
+  </p:clrMapOvr>
+</p:sld>
+</file>
+
+<file path=ppt/slides/slide21.xml><?xml version="1.0" encoding="utf-8"?>
 <p:sld xmlns:a="http://schemas.openxmlformats.org/drawingml/2006/main" xmlns:p="http://schemas.openxmlformats.org/presentationml/2006/main" xmlns:r="http://schemas.openxmlformats.org/officeDocument/2006/relationships">
   <p:cSld>
     <p:bg>
@@ -8953,7 +9782,7 @@
                 </a:solidFill>
                 <a:latin typeface="맑은 고딕"/>
               </a:rPr>
-              <a:t>CleanMesh Studio v1.2 (Digital Twin)  ·  20/20</a:t>
+              <a:t>CleanMesh Studio v1.2 (Digital Twin)  ·  21/21</a:t>
             </a:r>
           </a:p>
         </p:txBody>
@@ -9640,7 +10469,7 @@
                 </a:solidFill>
                 <a:latin typeface="맑은 고딕"/>
               </a:rPr>
-              <a:t>CleanMesh Studio v1.2 (Digital Twin)  ·  3/20</a:t>
+              <a:t>CleanMesh Studio v1.2 (Digital Twin)  ·  3/21</a:t>
             </a:r>
           </a:p>
         </p:txBody>
@@ -10016,7 +10845,7 @@
                 </a:solidFill>
                 <a:latin typeface="맑은 고딕"/>
               </a:rPr>
-              <a:t>CleanMesh Studio v1.2 (Digital Twin)  ·  4/20</a:t>
+              <a:t>CleanMesh Studio v1.2 (Digital Twin)  ·  4/21</a:t>
             </a:r>
           </a:p>
         </p:txBody>
@@ -10668,7 +11497,7 @@
                 </a:solidFill>
                 <a:latin typeface="맑은 고딕"/>
               </a:rPr>
-              <a:t>CleanMesh Studio v1.2 (Digital Twin)  ·  5/20</a:t>
+              <a:t>CleanMesh Studio v1.2 (Digital Twin)  ·  5/21</a:t>
             </a:r>
           </a:p>
         </p:txBody>
@@ -11005,7 +11834,7 @@
                 </a:solidFill>
                 <a:latin typeface="맑은 고딕"/>
               </a:rPr>
-              <a:t>CleanMesh Studio v1.2 (Digital Twin)  ·  6/20</a:t>
+              <a:t>CleanMesh Studio v1.2 (Digital Twin)  ·  6/21</a:t>
             </a:r>
           </a:p>
         </p:txBody>
@@ -11357,7 +12186,7 @@
                 </a:solidFill>
                 <a:latin typeface="맑은 고딕"/>
               </a:rPr>
-              <a:t>CleanMesh Studio v1.2 (Digital Twin)  ·  7/20</a:t>
+              <a:t>CleanMesh Studio v1.2 (Digital Twin)  ·  7/21</a:t>
             </a:r>
           </a:p>
         </p:txBody>
@@ -11810,7 +12639,7 @@
                 </a:solidFill>
                 <a:latin typeface="맑은 고딕"/>
               </a:rPr>
-              <a:t>CleanMesh Studio v1.2 (Digital Twin)  ·  8/20</a:t>
+              <a:t>CleanMesh Studio v1.2 (Digital Twin)  ·  8/21</a:t>
             </a:r>
           </a:p>
         </p:txBody>
@@ -12608,7 +13437,7 @@
                 </a:solidFill>
                 <a:latin typeface="맑은 고딕"/>
               </a:rPr>
-              <a:t>CleanMesh Studio v1.2 (Digital Twin)  ·  9/20</a:t>
+              <a:t>CleanMesh Studio v1.2 (Digital Twin)  ·  9/21</a:t>
             </a:r>
           </a:p>
         </p:txBody>

--- a/CleanMesh_매뉴얼.pptx
+++ b/CleanMesh_매뉴얼.pptx
@@ -3294,7 +3294,7 @@
                 </a:solidFill>
                 <a:latin typeface="맑은 고딕"/>
               </a:rPr>
-              <a:t>2026-06-30</a:t>
+              <a:t>2026-07-01</a:t>
             </a:r>
           </a:p>
         </p:txBody>
@@ -6184,7 +6184,7 @@
                 </a:solidFill>
                 <a:latin typeface="맑은 고딕"/>
               </a:rPr>
-              <a:t>14. 디렉토리 구조 (v1.1)</a:t>
+              <a:t>14. 디렉토리 구조 (v1.2)</a:t>
             </a:r>
           </a:p>
         </p:txBody>
@@ -12700,7 +12700,7 @@
                 </a:solidFill>
                 <a:latin typeface="맑은 고딕"/>
               </a:rPr>
-              <a:t>8. 잡티 제거 강도 (v1.1)</a:t>
+              <a:t>8. 잡티 제거 강도 (v1.2)</a:t>
             </a:r>
           </a:p>
         </p:txBody>
